--- a/dbt Presentation/dbt_snowflake_intro_presentation.pptx
+++ b/dbt Presentation/dbt_snowflake_intro_presentation.pptx
@@ -110,6 +110,11 @@
       </a:defRPr>
     </a:lvl9pPr>
   </p:defaultTextStyle>
+  <p:extLst>
+    <p:ext uri="{EFAFB233-063F-42B5-8137-9DF3F51BA10A}">
+      <p15:sldGuideLst xmlns:p15="http://schemas.microsoft.com/office/powerpoint/2012/main"/>
+    </p:ext>
+  </p:extLst>
 </p:presentation>
 </file>
 
@@ -118,16 +123,24 @@
   <pc:docChgLst>
     <pc:chgData name="Michael Yesgat" userId="51f5999cd7e46e83" providerId="LiveId" clId="{9AD58859-AC3E-40C5-B6E1-18D805075A28}"/>
     <pc:docChg chg="modSld">
-      <pc:chgData name="Michael Yesgat" userId="51f5999cd7e46e83" providerId="LiveId" clId="{9AD58859-AC3E-40C5-B6E1-18D805075A28}" dt="2026-07-28T04:59:57.816" v="3" actId="20577"/>
+      <pc:chgData name="Michael Yesgat" userId="51f5999cd7e46e83" providerId="LiveId" clId="{9AD58859-AC3E-40C5-B6E1-18D805075A28}" dt="2026-07-29T18:06:11.371" v="19" actId="20577"/>
       <pc:docMkLst>
         <pc:docMk/>
       </pc:docMkLst>
-      <pc:sldChg chg="modNotesTx">
-        <pc:chgData name="Michael Yesgat" userId="51f5999cd7e46e83" providerId="LiveId" clId="{9AD58859-AC3E-40C5-B6E1-18D805075A28}" dt="2026-07-28T04:59:41.695" v="1" actId="20577"/>
+      <pc:sldChg chg="modSp mod modNotesTx">
+        <pc:chgData name="Michael Yesgat" userId="51f5999cd7e46e83" providerId="LiveId" clId="{9AD58859-AC3E-40C5-B6E1-18D805075A28}" dt="2026-07-29T18:06:11.371" v="19" actId="20577"/>
         <pc:sldMkLst>
           <pc:docMk/>
           <pc:sldMk cId="2009129580" sldId="256"/>
         </pc:sldMkLst>
+        <pc:spChg chg="mod">
+          <ac:chgData name="Michael Yesgat" userId="51f5999cd7e46e83" providerId="LiveId" clId="{9AD58859-AC3E-40C5-B6E1-18D805075A28}" dt="2026-07-29T18:06:11.371" v="19" actId="20577"/>
+          <ac:spMkLst>
+            <pc:docMk/>
+            <pc:sldMk cId="2009129580" sldId="256"/>
+            <ac:spMk id="3" creationId="{3FE09EC9-25F0-40EB-A681-9D45B9319217}"/>
+          </ac:spMkLst>
+        </pc:spChg>
       </pc:sldChg>
       <pc:sldChg chg="modNotesTx">
         <pc:chgData name="Michael Yesgat" userId="51f5999cd7e46e83" providerId="LiveId" clId="{9AD58859-AC3E-40C5-B6E1-18D805075A28}" dt="2026-07-28T04:59:34.728" v="0" actId="20577"/>
@@ -1133,16 +1146,24 @@
               </a:defRPr>
             </a:pPr>
             <a:r>
-              <a:rPr sz="2250">
-                <a:solidFill>
-                  <a:srgbClr val="4A4A4A"/>
-                </a:solidFill>
-                <a:latin typeface="Helvetica Neue"/>
-                <a:ea typeface="Helvetica Neue"/>
-                <a:cs typeface="Helvetica Neue"/>
-              </a:rPr>
-              <a:t>Transform SQL into tested models, visible lineage, and trusted analytics</a:t>
-            </a:r>
+              <a:rPr lang="en-US" sz="2250">
+                <a:solidFill>
+                  <a:srgbClr val="4A4A4A"/>
+                </a:solidFill>
+                <a:latin typeface="Helvetica Neue"/>
+                <a:ea typeface="Helvetica Neue"/>
+                <a:cs typeface="Helvetica Neue"/>
+              </a:rPr>
+              <a:t>Michael Yesgat</a:t>
+            </a:r>
+            <a:endParaRPr sz="2250" dirty="0">
+              <a:solidFill>
+                <a:srgbClr val="4A4A4A"/>
+              </a:solidFill>
+              <a:latin typeface="Helvetica Neue"/>
+              <a:ea typeface="Helvetica Neue"/>
+              <a:cs typeface="Helvetica Neue"/>
+            </a:endParaRPr>
           </a:p>
         </p:txBody>
       </p:sp>
